--- a/lessons/6-1-flagship/slides.pptx
+++ b/lessons/6-1-flagship/slides.pptx
@@ -10925,7 +10925,7 @@
       </p:sp>
       <p:sp>
         <p:nvSpPr>
-          <p:cNvPr id="20" name="Shape 18"/>
+          <p:cNvPr id="20" name="Text 18"/>
           <p:cNvSpPr/>
           <p:nvPr/>
         </p:nvSpPr>
@@ -10946,33 +10946,7 @@
             <a:solidFill>
               <a:srgbClr val="D6DBDF"/>
             </a:solidFill>
-            <a:prstDash val="solid"/>
           </a:ln>
-          <a:effectLst>
-            <a:outerShdw sx="100000" sy="100000" kx="0" ky="0" algn="bl" rotWithShape="0" blurRad="50800" dist="12700" dir="5400000">
-              <a:srgbClr val="1C2E42">
-                <a:alpha val="10000"/>
-              </a:srgbClr>
-            </a:outerShdw>
-          </a:effectLst>
-        </p:spPr>
-      </p:sp>
-      <p:sp>
-        <p:nvSpPr>
-          <p:cNvPr id="21" name="Text 19"/>
-          <p:cNvSpPr/>
-          <p:nvPr/>
-        </p:nvSpPr>
-        <p:spPr>
-          <a:xfrm>
-            <a:off x="685800" y="1481328"/>
-            <a:ext cx="1447800" cy="384048"/>
-          </a:xfrm>
-          <a:prstGeom prst="rect">
-            <a:avLst/>
-          </a:prstGeom>
-          <a:noFill/>
-          <a:ln/>
         </p:spPr>
         <p:txBody>
           <a:bodyPr wrap="square" rtlCol="0" anchor="ctr"/>
@@ -10982,7 +10956,7 @@
               <a:buNone/>
             </a:pPr>
             <a:r>
-              <a:rPr lang="en-US" sz="900" dirty="0">
+              <a:rPr lang="en-US" sz="900" b="1" dirty="0">
                 <a:solidFill>
                   <a:srgbClr val="17324D"/>
                 </a:solidFill>
@@ -10998,7 +10972,7 @@
       </p:sp>
       <p:sp>
         <p:nvSpPr>
-          <p:cNvPr id="22" name="Shape 20"/>
+          <p:cNvPr id="21" name="Text 19"/>
           <p:cNvSpPr/>
           <p:nvPr/>
         </p:nvSpPr>
@@ -11019,33 +10993,7 @@
             <a:solidFill>
               <a:srgbClr val="D6DBDF"/>
             </a:solidFill>
-            <a:prstDash val="solid"/>
           </a:ln>
-          <a:effectLst>
-            <a:outerShdw sx="100000" sy="100000" kx="0" ky="0" algn="bl" rotWithShape="0" blurRad="50800" dist="12700" dir="5400000">
-              <a:srgbClr val="1C2E42">
-                <a:alpha val="10000"/>
-              </a:srgbClr>
-            </a:outerShdw>
-          </a:effectLst>
-        </p:spPr>
-      </p:sp>
-      <p:sp>
-        <p:nvSpPr>
-          <p:cNvPr id="23" name="Text 21"/>
-          <p:cNvSpPr/>
-          <p:nvPr/>
-        </p:nvSpPr>
-        <p:spPr>
-          <a:xfrm>
-            <a:off x="2453640" y="1481328"/>
-            <a:ext cx="1447800" cy="384048"/>
-          </a:xfrm>
-          <a:prstGeom prst="rect">
-            <a:avLst/>
-          </a:prstGeom>
-          <a:noFill/>
-          <a:ln/>
         </p:spPr>
         <p:txBody>
           <a:bodyPr wrap="square" rtlCol="0" anchor="ctr"/>
@@ -11055,7 +11003,7 @@
               <a:buNone/>
             </a:pPr>
             <a:r>
-              <a:rPr lang="en-US" sz="900" dirty="0">
+              <a:rPr lang="en-US" sz="900" b="1" dirty="0">
                 <a:solidFill>
                   <a:srgbClr val="17324D"/>
                 </a:solidFill>
@@ -11071,7 +11019,7 @@
       </p:sp>
       <p:sp>
         <p:nvSpPr>
-          <p:cNvPr id="24" name="Shape 22"/>
+          <p:cNvPr id="22" name="Text 20"/>
           <p:cNvSpPr/>
           <p:nvPr/>
         </p:nvSpPr>
@@ -11092,33 +11040,7 @@
             <a:solidFill>
               <a:srgbClr val="D6DBDF"/>
             </a:solidFill>
-            <a:prstDash val="solid"/>
           </a:ln>
-          <a:effectLst>
-            <a:outerShdw sx="100000" sy="100000" kx="0" ky="0" algn="bl" rotWithShape="0" blurRad="50800" dist="12700" dir="5400000">
-              <a:srgbClr val="1C2E42">
-                <a:alpha val="10000"/>
-              </a:srgbClr>
-            </a:outerShdw>
-          </a:effectLst>
-        </p:spPr>
-      </p:sp>
-      <p:sp>
-        <p:nvSpPr>
-          <p:cNvPr id="25" name="Text 23"/>
-          <p:cNvSpPr/>
-          <p:nvPr/>
-        </p:nvSpPr>
-        <p:spPr>
-          <a:xfrm>
-            <a:off x="4221480" y="1481328"/>
-            <a:ext cx="1447800" cy="384048"/>
-          </a:xfrm>
-          <a:prstGeom prst="rect">
-            <a:avLst/>
-          </a:prstGeom>
-          <a:noFill/>
-          <a:ln/>
         </p:spPr>
         <p:txBody>
           <a:bodyPr wrap="square" rtlCol="0" anchor="ctr"/>
@@ -11128,7 +11050,7 @@
               <a:buNone/>
             </a:pPr>
             <a:r>
-              <a:rPr lang="en-US" sz="900" dirty="0">
+              <a:rPr lang="en-US" sz="900" b="1" dirty="0">
                 <a:solidFill>
                   <a:srgbClr val="17324D"/>
                 </a:solidFill>
@@ -11144,7 +11066,7 @@
       </p:sp>
       <p:sp>
         <p:nvSpPr>
-          <p:cNvPr id="26" name="Shape 24"/>
+          <p:cNvPr id="23" name="Text 21"/>
           <p:cNvSpPr/>
           <p:nvPr/>
         </p:nvSpPr>
@@ -11165,33 +11087,7 @@
             <a:solidFill>
               <a:srgbClr val="D6DBDF"/>
             </a:solidFill>
-            <a:prstDash val="solid"/>
           </a:ln>
-          <a:effectLst>
-            <a:outerShdw sx="100000" sy="100000" kx="0" ky="0" algn="bl" rotWithShape="0" blurRad="50800" dist="12700" dir="5400000">
-              <a:srgbClr val="1C2E42">
-                <a:alpha val="10000"/>
-              </a:srgbClr>
-            </a:outerShdw>
-          </a:effectLst>
-        </p:spPr>
-      </p:sp>
-      <p:sp>
-        <p:nvSpPr>
-          <p:cNvPr id="27" name="Text 25"/>
-          <p:cNvSpPr/>
-          <p:nvPr/>
-        </p:nvSpPr>
-        <p:spPr>
-          <a:xfrm>
-            <a:off x="685800" y="1975104"/>
-            <a:ext cx="1447800" cy="384048"/>
-          </a:xfrm>
-          <a:prstGeom prst="rect">
-            <a:avLst/>
-          </a:prstGeom>
-          <a:noFill/>
-          <a:ln/>
         </p:spPr>
         <p:txBody>
           <a:bodyPr wrap="square" rtlCol="0" anchor="ctr"/>
@@ -11201,7 +11097,7 @@
               <a:buNone/>
             </a:pPr>
             <a:r>
-              <a:rPr lang="en-US" sz="900" dirty="0">
+              <a:rPr lang="en-US" sz="900" b="1" dirty="0">
                 <a:solidFill>
                   <a:srgbClr val="17324D"/>
                 </a:solidFill>
@@ -11217,7 +11113,7 @@
       </p:sp>
       <p:sp>
         <p:nvSpPr>
-          <p:cNvPr id="28" name="Shape 26"/>
+          <p:cNvPr id="24" name="Shape 22"/>
           <p:cNvSpPr/>
           <p:nvPr/>
         </p:nvSpPr>
@@ -11251,7 +11147,7 @@
       </p:sp>
       <p:sp>
         <p:nvSpPr>
-          <p:cNvPr id="29" name="Text 27"/>
+          <p:cNvPr id="25" name="Text 23"/>
           <p:cNvSpPr/>
           <p:nvPr/>
         </p:nvSpPr>
@@ -11292,7 +11188,7 @@
       </p:sp>
       <p:sp>
         <p:nvSpPr>
-          <p:cNvPr id="30" name="Shape 28"/>
+          <p:cNvPr id="26" name="Shape 24"/>
           <p:cNvSpPr/>
           <p:nvPr/>
         </p:nvSpPr>
@@ -11326,7 +11222,7 @@
       </p:sp>
       <p:sp>
         <p:nvSpPr>
-          <p:cNvPr id="31" name="Text 29"/>
+          <p:cNvPr id="27" name="Text 25"/>
           <p:cNvSpPr/>
           <p:nvPr/>
         </p:nvSpPr>
@@ -11367,7 +11263,7 @@
       </p:sp>
       <p:sp>
         <p:nvSpPr>
-          <p:cNvPr id="32" name="Shape 30"/>
+          <p:cNvPr id="28" name="Shape 26"/>
           <p:cNvSpPr/>
           <p:nvPr/>
         </p:nvSpPr>
@@ -11401,7 +11297,7 @@
       </p:sp>
       <p:sp>
         <p:nvSpPr>
-          <p:cNvPr id="33" name="Text 31"/>
+          <p:cNvPr id="29" name="Text 27"/>
           <p:cNvSpPr/>
           <p:nvPr/>
         </p:nvSpPr>
@@ -11442,7 +11338,7 @@
       </p:sp>
       <p:sp>
         <p:nvSpPr>
-          <p:cNvPr id="34" name="Text 32"/>
+          <p:cNvPr id="30" name="Text 28"/>
           <p:cNvSpPr/>
           <p:nvPr/>
         </p:nvSpPr>
@@ -11481,7 +11377,7 @@
       </p:sp>
       <p:sp>
         <p:nvSpPr>
-          <p:cNvPr id="35" name="Shape 33"/>
+          <p:cNvPr id="31" name="Shape 29"/>
           <p:cNvSpPr/>
           <p:nvPr/>
         </p:nvSpPr>
@@ -11504,7 +11400,7 @@
       </p:sp>
       <p:sp>
         <p:nvSpPr>
-          <p:cNvPr id="36" name="Shape 34"/>
+          <p:cNvPr id="32" name="Shape 30"/>
           <p:cNvSpPr/>
           <p:nvPr/>
         </p:nvSpPr>
@@ -11527,7 +11423,7 @@
       </p:sp>
       <p:sp>
         <p:nvSpPr>
-          <p:cNvPr id="37" name="Shape 35"/>
+          <p:cNvPr id="33" name="Shape 31"/>
           <p:cNvSpPr/>
           <p:nvPr/>
         </p:nvSpPr>
@@ -11550,7 +11446,7 @@
       </p:sp>
       <p:sp>
         <p:nvSpPr>
-          <p:cNvPr id="38" name="Shape 36"/>
+          <p:cNvPr id="34" name="Shape 32"/>
           <p:cNvSpPr/>
           <p:nvPr/>
         </p:nvSpPr>
@@ -11573,7 +11469,7 @@
       </p:sp>
       <p:sp>
         <p:nvSpPr>
-          <p:cNvPr id="39" name="Shape 37"/>
+          <p:cNvPr id="35" name="Shape 33"/>
           <p:cNvSpPr/>
           <p:nvPr/>
         </p:nvSpPr>

--- a/lessons/6-1-flagship/slides.pptx
+++ b/lessons/6-1-flagship/slides.pptx
@@ -2495,7 +2495,7 @@
                 <a:ea typeface="Outfit" pitchFamily="34" charset="-122"/>
                 <a:cs typeface="Outfit" pitchFamily="34" charset="-120"/>
               </a:rPr>
-              <a:t>6.EE.1</a:t>
+              <a:t>6.AT.5</a:t>
             </a:r>
             <a:endParaRPr lang="en-US" sz="1000" dirty="0"/>
           </a:p>
@@ -3218,7 +3218,7 @@
                 <a:ea typeface="Outfit" pitchFamily="34" charset="-122"/>
                 <a:cs typeface="Outfit" pitchFamily="34" charset="-120"/>
               </a:rPr>
-              <a:t>6.EE.1</a:t>
+              <a:t>6.AT.5</a:t>
             </a:r>
             <a:endParaRPr lang="en-US" sz="900" dirty="0"/>
           </a:p>
@@ -4328,7 +4328,7 @@
                 <a:ea typeface="Outfit" pitchFamily="34" charset="-122"/>
                 <a:cs typeface="Outfit" pitchFamily="34" charset="-120"/>
               </a:rPr>
-              <a:t>6.EE.1</a:t>
+              <a:t>6.AT.5</a:t>
             </a:r>
             <a:endParaRPr lang="en-US" sz="900" dirty="0"/>
           </a:p>
@@ -5597,7 +5597,7 @@
                 <a:ea typeface="Outfit" pitchFamily="34" charset="-122"/>
                 <a:cs typeface="Outfit" pitchFamily="34" charset="-120"/>
               </a:rPr>
-              <a:t>6.EE.1</a:t>
+              <a:t>6.AT.5</a:t>
             </a:r>
             <a:endParaRPr lang="en-US" sz="900" dirty="0"/>
           </a:p>
@@ -6891,7 +6891,7 @@
                 <a:ea typeface="Outfit" pitchFamily="34" charset="-122"/>
                 <a:cs typeface="Outfit" pitchFamily="34" charset="-120"/>
               </a:rPr>
-              <a:t>6.EE.1</a:t>
+              <a:t>6.AT.5</a:t>
             </a:r>
             <a:endParaRPr lang="en-US" sz="900" dirty="0"/>
           </a:p>
@@ -7953,7 +7953,7 @@
                 <a:ea typeface="Outfit" pitchFamily="34" charset="-122"/>
                 <a:cs typeface="Outfit" pitchFamily="34" charset="-120"/>
               </a:rPr>
-              <a:t>6.EE.1</a:t>
+              <a:t>6.AT.5</a:t>
             </a:r>
             <a:endParaRPr lang="en-US" sz="900" dirty="0"/>
           </a:p>
@@ -8918,7 +8918,7 @@
                 <a:ea typeface="Outfit" pitchFamily="34" charset="-122"/>
                 <a:cs typeface="Outfit" pitchFamily="34" charset="-120"/>
               </a:rPr>
-              <a:t>6.EE.1</a:t>
+              <a:t>6.AT.5</a:t>
             </a:r>
             <a:endParaRPr lang="en-US" sz="900" dirty="0"/>
           </a:p>
@@ -9835,7 +9835,7 @@
                 <a:ea typeface="Outfit" pitchFamily="34" charset="-122"/>
                 <a:cs typeface="Outfit" pitchFamily="34" charset="-120"/>
               </a:rPr>
-              <a:t>6.EE.1</a:t>
+              <a:t>6.AT.5</a:t>
             </a:r>
             <a:endParaRPr lang="en-US" sz="900" dirty="0"/>
           </a:p>
@@ -10963,7 +10963,7 @@
                 <a:ea typeface="Outfit" pitchFamily="34" charset="-122"/>
                 <a:cs typeface="Outfit" pitchFamily="34" charset="-120"/>
               </a:rPr>
-              <a:t>6.EE.1</a:t>
+              <a:t>6.AT.5</a:t>
             </a:r>
             <a:endParaRPr lang="en-US" sz="900" dirty="0"/>
           </a:p>
@@ -12396,7 +12396,7 @@
                 <a:ea typeface="Outfit" pitchFamily="34" charset="-122"/>
                 <a:cs typeface="Outfit" pitchFamily="34" charset="-120"/>
               </a:rPr>
-              <a:t>6.EE.1</a:t>
+              <a:t>6.AT.5</a:t>
             </a:r>
             <a:endParaRPr lang="en-US" sz="900" dirty="0"/>
           </a:p>
@@ -13210,7 +13210,7 @@
                 <a:ea typeface="Outfit" pitchFamily="34" charset="-122"/>
                 <a:cs typeface="Outfit" pitchFamily="34" charset="-120"/>
               </a:rPr>
-              <a:t>6.EE.1</a:t>
+              <a:t>6.AT.5</a:t>
             </a:r>
             <a:endParaRPr lang="en-US" sz="900" dirty="0"/>
           </a:p>
@@ -14317,7 +14317,7 @@
                 <a:ea typeface="Outfit" pitchFamily="34" charset="-122"/>
                 <a:cs typeface="Outfit" pitchFamily="34" charset="-120"/>
               </a:rPr>
-              <a:t>6.EE.1</a:t>
+              <a:t>6.AT.5</a:t>
             </a:r>
             <a:endParaRPr lang="en-US" sz="900" dirty="0"/>
           </a:p>
@@ -15424,7 +15424,7 @@
                 <a:ea typeface="Outfit" pitchFamily="34" charset="-122"/>
                 <a:cs typeface="Outfit" pitchFamily="34" charset="-120"/>
               </a:rPr>
-              <a:t>6.EE.1</a:t>
+              <a:t>6.AT.5</a:t>
             </a:r>
             <a:endParaRPr lang="en-US" sz="900" dirty="0"/>
           </a:p>
@@ -16531,7 +16531,7 @@
                 <a:ea typeface="Outfit" pitchFamily="34" charset="-122"/>
                 <a:cs typeface="Outfit" pitchFamily="34" charset="-120"/>
               </a:rPr>
-              <a:t>6.EE.1</a:t>
+              <a:t>6.AT.5</a:t>
             </a:r>
             <a:endParaRPr lang="en-US" sz="900" dirty="0"/>
           </a:p>
@@ -17419,6 +17419,53 @@
                 <a:cs typeface="Hanken Grotesk" pitchFamily="34" charset="-120"/>
               </a:rPr>
               <a:t>Evaluate</a:t>
+            </a:r>
+            <a:endParaRPr lang="en-US" sz="900" dirty="0"/>
+          </a:p>
+        </p:txBody>
+      </p:sp>
+      <p:sp>
+        <p:nvSpPr>
+          <p:cNvPr id="32" name="Text 30"/>
+          <p:cNvSpPr/>
+          <p:nvPr/>
+        </p:nvSpPr>
+        <p:spPr>
+          <a:xfrm>
+            <a:off x="6263640" y="3666744"/>
+            <a:ext cx="1120140" cy="329184"/>
+          </a:xfrm>
+          <a:prstGeom prst="roundRect">
+            <a:avLst>
+              <a:gd name="adj" fmla="val 13889"/>
+            </a:avLst>
+          </a:prstGeom>
+          <a:solidFill>
+            <a:srgbClr val="FFFFFF"/>
+          </a:solidFill>
+          <a:ln w="12700">
+            <a:solidFill>
+              <a:srgbClr val="D6DBDF"/>
+            </a:solidFill>
+          </a:ln>
+        </p:spPr>
+        <p:txBody>
+          <a:bodyPr wrap="square" rtlCol="0" anchor="ctr"/>
+          <a:lstStyle/>
+          <a:p>
+            <a:pPr algn="ctr" indent="0" marL="0">
+              <a:buNone/>
+            </a:pPr>
+            <a:r>
+              <a:rPr lang="en-US" sz="900" b="1" dirty="0">
+                <a:solidFill>
+                  <a:srgbClr val="17324D"/>
+                </a:solidFill>
+                <a:latin typeface="Hanken Grotesk" pitchFamily="34" charset="0"/>
+                <a:ea typeface="Hanken Grotesk" pitchFamily="34" charset="-122"/>
+                <a:cs typeface="Hanken Grotesk" pitchFamily="34" charset="-120"/>
+              </a:rPr>
+              <a:t>Repeated multiplication</a:t>
             </a:r>
             <a:endParaRPr lang="en-US" sz="900" dirty="0"/>
           </a:p>
@@ -17591,7 +17638,7 @@
                 <a:ea typeface="Outfit" pitchFamily="34" charset="-122"/>
                 <a:cs typeface="Outfit" pitchFamily="34" charset="-120"/>
               </a:rPr>
-              <a:t>6.EE.1</a:t>
+              <a:t>6.AT.5</a:t>
             </a:r>
             <a:endParaRPr lang="en-US" sz="900" dirty="0"/>
           </a:p>
@@ -18579,7 +18626,7 @@
                 <a:ea typeface="Outfit" pitchFamily="34" charset="-122"/>
                 <a:cs typeface="Outfit" pitchFamily="34" charset="-120"/>
               </a:rPr>
-              <a:t>6.EE.1</a:t>
+              <a:t>6.AT.5</a:t>
             </a:r>
             <a:endParaRPr lang="en-US" sz="900" dirty="0"/>
           </a:p>
@@ -20092,260 +20139,6 @@
                   </a:tcPr>
                 </a:tc>
               </a:tr>
-              <a:tr h="457200">
-                <a:tc>
-                  <a:txBody>
-                    <a:bodyPr/>
-                    <a:lstStyle/>
-                    <a:p>
-                      <a:pPr indent="0" marL="0">
-                        <a:buNone/>
-                      </a:pPr>
-                      <a:r>
-                        <a:rPr lang="en-US" sz="950" b="1" dirty="0">
-                          <a:solidFill>
-                            <a:srgbClr val="17324D"/>
-                          </a:solidFill>
-                          <a:latin typeface="Hanken Grotesk" pitchFamily="34" charset="0"/>
-                          <a:ea typeface="Hanken Grotesk" pitchFamily="34" charset="-122"/>
-                          <a:cs typeface="Hanken Grotesk" pitchFamily="34" charset="-120"/>
-                        </a:rPr>
-                        <a:t>Coefficient</a:t>
-                      </a:r>
-                      <a:pPr indent="0" marL="0">
-                        <a:buNone/>
-                      </a:pPr>
-                      <a:endParaRPr lang="en-US" sz="950" dirty="0">
-                        <a:latin typeface="Hanken Grotesk" charset="0"/>
-                        <a:ea typeface="Hanken Grotesk" charset="0"/>
-                        <a:cs typeface="Hanken Grotesk" charset="0"/>
-                      </a:endParaRPr>
-                    </a:p>
-                    <a:p>
-                      <a:pPr indent="0" marL="0">
-                        <a:buNone/>
-                      </a:pPr>
-                      <a:r>
-                        <a:rPr lang="en-US" sz="850" i="1" dirty="0">
-                          <a:solidFill>
-                            <a:srgbClr val="8A96A3"/>
-                          </a:solidFill>
-                          <a:latin typeface="Hanken Grotesk" pitchFamily="34" charset="0"/>
-                          <a:ea typeface="Hanken Grotesk" pitchFamily="34" charset="-122"/>
-                          <a:cs typeface="Hanken Grotesk" pitchFamily="34" charset="-120"/>
-                        </a:rPr>
-                        <a:t>Coeficiente</a:t>
-                      </a:r>
-                      <a:endParaRPr lang="en-US" sz="950" dirty="0">
-                        <a:latin typeface="Hanken Grotesk" charset="0"/>
-                        <a:ea typeface="Hanken Grotesk" charset="0"/>
-                        <a:cs typeface="Hanken Grotesk" charset="0"/>
-                      </a:endParaRPr>
-                    </a:p>
-                  </a:txBody>
-                  <a:tcPr marL="91440" marR="91440" marT="45720" marB="45720" anchor="ctr">
-                    <a:lnL w="9525" cap="flat" cmpd="sng" algn="ctr">
-                      <a:solidFill>
-                        <a:srgbClr val="D6DBDF"/>
-                      </a:solidFill>
-                      <a:prstDash val="solid"/>
-                      <a:round/>
-                      <a:headEnd type="none" w="med" len="med"/>
-                      <a:tailEnd type="none" w="med" len="med"/>
-                    </a:lnL>
-                    <a:lnR w="9525" cap="flat" cmpd="sng" algn="ctr">
-                      <a:solidFill>
-                        <a:srgbClr val="D6DBDF"/>
-                      </a:solidFill>
-                      <a:prstDash val="solid"/>
-                      <a:round/>
-                      <a:headEnd type="none" w="med" len="med"/>
-                      <a:tailEnd type="none" w="med" len="med"/>
-                    </a:lnR>
-                    <a:lnT w="9525" cap="flat" cmpd="sng" algn="ctr">
-                      <a:solidFill>
-                        <a:srgbClr val="D6DBDF"/>
-                      </a:solidFill>
-                      <a:prstDash val="solid"/>
-                      <a:round/>
-                      <a:headEnd type="none" w="med" len="med"/>
-                      <a:tailEnd type="none" w="med" len="med"/>
-                    </a:lnT>
-                    <a:lnB w="9525" cap="flat" cmpd="sng" algn="ctr">
-                      <a:solidFill>
-                        <a:srgbClr val="D6DBDF"/>
-                      </a:solidFill>
-                      <a:prstDash val="solid"/>
-                      <a:round/>
-                      <a:headEnd type="none" w="med" len="med"/>
-                      <a:tailEnd type="none" w="med" len="med"/>
-                    </a:lnB>
-                    <a:solidFill>
-                      <a:srgbClr val="FFFFFF"/>
-                    </a:solidFill>
-                  </a:tcPr>
-                </a:tc>
-                <a:tc>
-                  <a:txBody>
-                    <a:bodyPr/>
-                    <a:lstStyle/>
-                    <a:p>
-                      <a:pPr indent="0" marL="0">
-                        <a:buNone/>
-                      </a:pPr>
-                      <a:r>
-                        <a:rPr lang="en-US" sz="900" dirty="0">
-                          <a:solidFill>
-                            <a:srgbClr val="24323F"/>
-                          </a:solidFill>
-                          <a:latin typeface="Hanken Grotesk" pitchFamily="34" charset="0"/>
-                          <a:ea typeface="Hanken Grotesk" pitchFamily="34" charset="-122"/>
-                          <a:cs typeface="Hanken Grotesk" pitchFamily="34" charset="-120"/>
-                        </a:rPr>
-                        <a:t>The number in front of a letter, like the 3 in 3x.</a:t>
-                      </a:r>
-                      <a:pPr indent="0" marL="0">
-                        <a:buNone/>
-                      </a:pPr>
-                      <a:endParaRPr lang="en-US" sz="900" dirty="0">
-                        <a:latin typeface="Hanken Grotesk" charset="0"/>
-                        <a:ea typeface="Hanken Grotesk" charset="0"/>
-                        <a:cs typeface="Hanken Grotesk" charset="0"/>
-                      </a:endParaRPr>
-                    </a:p>
-                    <a:p>
-                      <a:pPr indent="0" marL="0">
-                        <a:buNone/>
-                      </a:pPr>
-                      <a:r>
-                        <a:rPr lang="en-US" sz="850" i="1" dirty="0">
-                          <a:solidFill>
-                            <a:srgbClr val="8A96A3"/>
-                          </a:solidFill>
-                          <a:latin typeface="Hanken Grotesk" pitchFamily="34" charset="0"/>
-                          <a:ea typeface="Hanken Grotesk" pitchFamily="34" charset="-122"/>
-                          <a:cs typeface="Hanken Grotesk" pitchFamily="34" charset="-120"/>
-                        </a:rPr>
-                        <a:t>El número frente a una letra, como el 3 en 3x.</a:t>
-                      </a:r>
-                      <a:endParaRPr lang="en-US" sz="900" dirty="0">
-                        <a:latin typeface="Hanken Grotesk" charset="0"/>
-                        <a:ea typeface="Hanken Grotesk" charset="0"/>
-                        <a:cs typeface="Hanken Grotesk" charset="0"/>
-                      </a:endParaRPr>
-                    </a:p>
-                  </a:txBody>
-                  <a:tcPr marL="91440" marR="91440" marT="45720" marB="45720" anchor="ctr">
-                    <a:lnL w="9525" cap="flat" cmpd="sng" algn="ctr">
-                      <a:solidFill>
-                        <a:srgbClr val="D6DBDF"/>
-                      </a:solidFill>
-                      <a:prstDash val="solid"/>
-                      <a:round/>
-                      <a:headEnd type="none" w="med" len="med"/>
-                      <a:tailEnd type="none" w="med" len="med"/>
-                    </a:lnL>
-                    <a:lnR w="9525" cap="flat" cmpd="sng" algn="ctr">
-                      <a:solidFill>
-                        <a:srgbClr val="D6DBDF"/>
-                      </a:solidFill>
-                      <a:prstDash val="solid"/>
-                      <a:round/>
-                      <a:headEnd type="none" w="med" len="med"/>
-                      <a:tailEnd type="none" w="med" len="med"/>
-                    </a:lnR>
-                    <a:lnT w="9525" cap="flat" cmpd="sng" algn="ctr">
-                      <a:solidFill>
-                        <a:srgbClr val="D6DBDF"/>
-                      </a:solidFill>
-                      <a:prstDash val="solid"/>
-                      <a:round/>
-                      <a:headEnd type="none" w="med" len="med"/>
-                      <a:tailEnd type="none" w="med" len="med"/>
-                    </a:lnT>
-                    <a:lnB w="9525" cap="flat" cmpd="sng" algn="ctr">
-                      <a:solidFill>
-                        <a:srgbClr val="D6DBDF"/>
-                      </a:solidFill>
-                      <a:prstDash val="solid"/>
-                      <a:round/>
-                      <a:headEnd type="none" w="med" len="med"/>
-                      <a:tailEnd type="none" w="med" len="med"/>
-                    </a:lnB>
-                    <a:solidFill>
-                      <a:srgbClr val="FFFFFF"/>
-                    </a:solidFill>
-                  </a:tcPr>
-                </a:tc>
-                <a:tc>
-                  <a:txBody>
-                    <a:bodyPr/>
-                    <a:lstStyle/>
-                    <a:p>
-                      <a:pPr indent="0" marL="0">
-                        <a:buNone/>
-                      </a:pPr>
-                      <a:r>
-                        <a:rPr lang="en-US" sz="900" i="1" dirty="0">
-                          <a:solidFill>
-                            <a:srgbClr val="24323F"/>
-                          </a:solidFill>
-                          <a:latin typeface="Hanken Grotesk" pitchFamily="34" charset="0"/>
-                          <a:ea typeface="Hanken Grotesk" pitchFamily="34" charset="-122"/>
-                          <a:cs typeface="Hanken Grotesk" pitchFamily="34" charset="-120"/>
-                        </a:rPr>
-                        <a:t>In 3x, the 3 is the coefficient — if x = 4, then 3x = 3 × 4 = 12</a:t>
-                      </a:r>
-                      <a:endParaRPr lang="en-US" sz="900" dirty="0">
-                        <a:latin typeface="Hanken Grotesk" charset="0"/>
-                        <a:ea typeface="Hanken Grotesk" charset="0"/>
-                        <a:cs typeface="Hanken Grotesk" charset="0"/>
-                      </a:endParaRPr>
-                    </a:p>
-                  </a:txBody>
-                  <a:tcPr marL="91440" marR="91440" marT="45720" marB="45720" anchor="ctr">
-                    <a:lnL w="9525" cap="flat" cmpd="sng" algn="ctr">
-                      <a:solidFill>
-                        <a:srgbClr val="D6DBDF"/>
-                      </a:solidFill>
-                      <a:prstDash val="solid"/>
-                      <a:round/>
-                      <a:headEnd type="none" w="med" len="med"/>
-                      <a:tailEnd type="none" w="med" len="med"/>
-                    </a:lnL>
-                    <a:lnR w="9525" cap="flat" cmpd="sng" algn="ctr">
-                      <a:solidFill>
-                        <a:srgbClr val="D6DBDF"/>
-                      </a:solidFill>
-                      <a:prstDash val="solid"/>
-                      <a:round/>
-                      <a:headEnd type="none" w="med" len="med"/>
-                      <a:tailEnd type="none" w="med" len="med"/>
-                    </a:lnR>
-                    <a:lnT w="9525" cap="flat" cmpd="sng" algn="ctr">
-                      <a:solidFill>
-                        <a:srgbClr val="D6DBDF"/>
-                      </a:solidFill>
-                      <a:prstDash val="solid"/>
-                      <a:round/>
-                      <a:headEnd type="none" w="med" len="med"/>
-                      <a:tailEnd type="none" w="med" len="med"/>
-                    </a:lnT>
-                    <a:lnB w="9525" cap="flat" cmpd="sng" algn="ctr">
-                      <a:solidFill>
-                        <a:srgbClr val="D6DBDF"/>
-                      </a:solidFill>
-                      <a:prstDash val="solid"/>
-                      <a:round/>
-                      <a:headEnd type="none" w="med" len="med"/>
-                      <a:tailEnd type="none" w="med" len="med"/>
-                    </a:lnB>
-                    <a:solidFill>
-                      <a:srgbClr val="FFFFFF"/>
-                    </a:solidFill>
-                  </a:tcPr>
-                </a:tc>
-              </a:tr>
             </a:tbl>
           </a:graphicData>
         </a:graphic>
@@ -20358,7 +20151,7 @@
         </p:nvSpPr>
         <p:spPr>
           <a:xfrm>
-            <a:off x="411480" y="3520440"/>
+            <a:off x="411480" y="3063240"/>
             <a:ext cx="8412480" cy="237744"/>
           </a:xfrm>
           <a:prstGeom prst="rect">
@@ -20397,7 +20190,7 @@
         </p:nvSpPr>
         <p:spPr>
           <a:xfrm>
-            <a:off x="411480" y="3813048"/>
+            <a:off x="411480" y="3355848"/>
             <a:ext cx="4114800" cy="457200"/>
           </a:xfrm>
           <a:prstGeom prst="roundRect">
@@ -20431,7 +20224,7 @@
         </p:nvSpPr>
         <p:spPr>
           <a:xfrm>
-            <a:off x="521208" y="3813048"/>
+            <a:off x="521208" y="3355848"/>
             <a:ext cx="3895344" cy="457200"/>
           </a:xfrm>
           <a:prstGeom prst="rect">
@@ -20498,7 +20291,7 @@
         </p:nvSpPr>
         <p:spPr>
           <a:xfrm>
-            <a:off x="4663440" y="3813048"/>
+            <a:off x="4663440" y="3355848"/>
             <a:ext cx="4114800" cy="457200"/>
           </a:xfrm>
           <a:prstGeom prst="roundRect">
@@ -20532,7 +20325,7 @@
         </p:nvSpPr>
         <p:spPr>
           <a:xfrm>
-            <a:off x="4773168" y="3813048"/>
+            <a:off x="4773168" y="3355848"/>
             <a:ext cx="3895344" cy="457200"/>
           </a:xfrm>
           <a:prstGeom prst="rect">
@@ -20758,7 +20551,7 @@
                 <a:ea typeface="Outfit" pitchFamily="34" charset="-122"/>
                 <a:cs typeface="Outfit" pitchFamily="34" charset="-120"/>
               </a:rPr>
-              <a:t>6.EE.1</a:t>
+              <a:t>6.AT.5</a:t>
             </a:r>
             <a:endParaRPr lang="en-US" sz="900" dirty="0"/>
           </a:p>
